--- a/slides/05-interaction.pptx
+++ b/slides/05-interaction.pptx
@@ -5,7 +5,7 @@
     <p:sldMasterId id="2147483660" r:id="rId1"/>
   </p:sldMasterIdLst>
   <p:notesMasterIdLst>
-    <p:notesMasterId r:id="rId13"/>
+    <p:notesMasterId r:id="rId15"/>
   </p:notesMasterIdLst>
   <p:sldIdLst>
     <p:sldId id="256" r:id="rId2"/>
@@ -19,6 +19,8 @@
     <p:sldId id="274" r:id="rId10"/>
     <p:sldId id="276" r:id="rId11"/>
     <p:sldId id="277" r:id="rId12"/>
+    <p:sldId id="278" r:id="rId13"/>
+    <p:sldId id="279" r:id="rId14"/>
   </p:sldIdLst>
   <p:sldSz cx="12192000" cy="6858000"/>
   <p:notesSz cx="6858000" cy="9144000"/>
@@ -207,7 +209,7 @@
           <a:p>
             <a:fld id="{2CD22518-F7FE-2E40-9C60-793856882CE6}" type="datetimeFigureOut">
               <a:rPr lang="en-US" smtClean="0"/>
-              <a:t>12/16/25</a:t>
+              <a:t>1/6/26</a:t>
             </a:fld>
             <a:endParaRPr lang="en-US"/>
           </a:p>
@@ -861,6 +863,877 @@
 </p:notes>
 </file>
 
+<file path=ppt/notesSlides/notesSlide5.xml><?xml version="1.0" encoding="utf-8"?>
+<p:notes xmlns:a="http://schemas.openxmlformats.org/drawingml/2006/main" xmlns:r="http://schemas.openxmlformats.org/officeDocument/2006/relationships" xmlns:p="http://schemas.openxmlformats.org/presentationml/2006/main">
+  <p:cSld>
+    <p:spTree>
+      <p:nvGrpSpPr>
+        <p:cNvPr id="1" name="">
+          <a:extLst>
+            <a:ext uri="{FF2B5EF4-FFF2-40B4-BE49-F238E27FC236}">
+              <a16:creationId xmlns:a16="http://schemas.microsoft.com/office/drawing/2014/main" id="{1C9C35CA-5D8D-9779-3677-33273ECDF29E}"/>
+            </a:ext>
+          </a:extLst>
+        </p:cNvPr>
+        <p:cNvGrpSpPr/>
+        <p:nvPr/>
+      </p:nvGrpSpPr>
+      <p:grpSpPr>
+        <a:xfrm>
+          <a:off x="0" y="0"/>
+          <a:ext cx="0" cy="0"/>
+          <a:chOff x="0" y="0"/>
+          <a:chExt cx="0" cy="0"/>
+        </a:xfrm>
+      </p:grpSpPr>
+      <p:sp>
+        <p:nvSpPr>
+          <p:cNvPr id="2" name="Slide Image Placeholder 1">
+            <a:extLst>
+              <a:ext uri="{FF2B5EF4-FFF2-40B4-BE49-F238E27FC236}">
+                <a16:creationId xmlns:a16="http://schemas.microsoft.com/office/drawing/2014/main" id="{C7D68A55-F5A7-4142-0522-79DC0813CE5C}"/>
+              </a:ext>
+            </a:extLst>
+          </p:cNvPr>
+          <p:cNvSpPr>
+            <a:spLocks noGrp="1" noRot="1" noChangeAspect="1"/>
+          </p:cNvSpPr>
+          <p:nvPr>
+            <p:ph type="sldImg"/>
+          </p:nvPr>
+        </p:nvSpPr>
+        <p:spPr/>
+      </p:sp>
+      <p:sp>
+        <p:nvSpPr>
+          <p:cNvPr id="3" name="Notes Placeholder 2">
+            <a:extLst>
+              <a:ext uri="{FF2B5EF4-FFF2-40B4-BE49-F238E27FC236}">
+                <a16:creationId xmlns:a16="http://schemas.microsoft.com/office/drawing/2014/main" id="{63B66104-1A66-6FD1-0143-639F9511F8E9}"/>
+              </a:ext>
+            </a:extLst>
+          </p:cNvPr>
+          <p:cNvSpPr>
+            <a:spLocks noGrp="1"/>
+          </p:cNvSpPr>
+          <p:nvPr>
+            <p:ph type="body" idx="1"/>
+          </p:nvPr>
+        </p:nvSpPr>
+        <p:spPr/>
+        <p:txBody>
+          <a:bodyPr/>
+          <a:lstStyle/>
+          <a:p>
+            <a:r>
+              <a:rPr lang="en-US" sz="1200" i="1" kern="1200" dirty="0">
+                <a:solidFill>
+                  <a:schemeClr val="tx1"/>
+                </a:solidFill>
+                <a:effectLst/>
+                <a:latin typeface="+mn-lt"/>
+                <a:ea typeface="+mn-ea"/>
+                <a:cs typeface="+mn-cs"/>
+              </a:rPr>
+              <a:t>INTERPLAY: We frame the definition via a dialogue metaphor as it is the</a:t>
+            </a:r>
+            <a:r>
+              <a:rPr lang="en-US" sz="1200" i="0" kern="1200" dirty="0">
+                <a:solidFill>
+                  <a:schemeClr val="tx1"/>
+                </a:solidFill>
+                <a:effectLst/>
+                <a:latin typeface="+mn-lt"/>
+                <a:ea typeface="+mn-ea"/>
+                <a:cs typeface="+mn-cs"/>
+              </a:rPr>
+              <a:t> </a:t>
+            </a:r>
+            <a:r>
+              <a:rPr lang="en-US" sz="1200" i="1" kern="1200" dirty="0">
+                <a:solidFill>
+                  <a:schemeClr val="tx1"/>
+                </a:solidFill>
+                <a:effectLst/>
+                <a:latin typeface="+mn-lt"/>
+                <a:ea typeface="+mn-ea"/>
+                <a:cs typeface="+mn-cs"/>
+              </a:rPr>
+              <a:t>common schema we observed in both visualization and HCI. </a:t>
+            </a:r>
+          </a:p>
+          <a:p>
+            <a:endParaRPr lang="en-US" sz="1200" i="1" kern="1200" dirty="0">
+              <a:solidFill>
+                <a:schemeClr val="tx1"/>
+              </a:solidFill>
+              <a:effectLst/>
+              <a:latin typeface="+mn-lt"/>
+              <a:ea typeface="+mn-ea"/>
+              <a:cs typeface="+mn-cs"/>
+            </a:endParaRPr>
+          </a:p>
+          <a:p>
+            <a:r>
+              <a:rPr lang="en-US" sz="1200" i="1" kern="1200" dirty="0">
+                <a:solidFill>
+                  <a:schemeClr val="tx1"/>
+                </a:solidFill>
+                <a:effectLst/>
+                <a:latin typeface="+mn-lt"/>
+                <a:ea typeface="+mn-ea"/>
+                <a:cs typeface="+mn-cs"/>
+              </a:rPr>
+              <a:t>PERSON: We replace the commonly reported entity of human “user”</a:t>
+            </a:r>
+            <a:r>
+              <a:rPr lang="en-US" sz="1200" i="0" kern="1200" dirty="0">
+                <a:solidFill>
+                  <a:schemeClr val="tx1"/>
+                </a:solidFill>
+                <a:effectLst/>
+                <a:latin typeface="+mn-lt"/>
+                <a:ea typeface="+mn-ea"/>
+                <a:cs typeface="+mn-cs"/>
+              </a:rPr>
+              <a:t> </a:t>
+            </a:r>
+            <a:r>
+              <a:rPr lang="en-US" sz="1200" i="1" kern="1200" dirty="0">
+                <a:solidFill>
+                  <a:schemeClr val="tx1"/>
+                </a:solidFill>
+                <a:effectLst/>
+                <a:latin typeface="+mn-lt"/>
+                <a:ea typeface="+mn-ea"/>
+                <a:cs typeface="+mn-cs"/>
+              </a:rPr>
+              <a:t>with the term person.</a:t>
+            </a:r>
+            <a:endParaRPr lang="en-US" sz="1200" kern="1200" dirty="0">
+              <a:solidFill>
+                <a:schemeClr val="tx1"/>
+              </a:solidFill>
+              <a:effectLst/>
+              <a:latin typeface="+mn-lt"/>
+              <a:ea typeface="+mn-ea"/>
+              <a:cs typeface="+mn-cs"/>
+            </a:endParaRPr>
+          </a:p>
+          <a:p>
+            <a:endParaRPr lang="en-US" sz="1200" i="1" kern="1200" dirty="0">
+              <a:solidFill>
+                <a:schemeClr val="tx1"/>
+              </a:solidFill>
+              <a:effectLst/>
+              <a:latin typeface="+mn-lt"/>
+              <a:ea typeface="+mn-ea"/>
+              <a:cs typeface="+mn-cs"/>
+            </a:endParaRPr>
+          </a:p>
+          <a:p>
+            <a:r>
+              <a:rPr lang="en-US" sz="1200" i="1" kern="1200" dirty="0">
+                <a:solidFill>
+                  <a:schemeClr val="tx1"/>
+                </a:solidFill>
+                <a:effectLst/>
+                <a:latin typeface="+mn-lt"/>
+                <a:ea typeface="+mn-ea"/>
+                <a:cs typeface="+mn-cs"/>
+              </a:rPr>
+              <a:t>DATA INTERFACE: The data interface</a:t>
+            </a:r>
+            <a:r>
+              <a:rPr lang="en-US" sz="1200" i="0" kern="1200" dirty="0">
+                <a:solidFill>
+                  <a:schemeClr val="tx1"/>
+                </a:solidFill>
+                <a:effectLst/>
+                <a:latin typeface="+mn-lt"/>
+                <a:ea typeface="+mn-ea"/>
+                <a:cs typeface="+mn-cs"/>
+              </a:rPr>
+              <a:t> </a:t>
+            </a:r>
+            <a:r>
+              <a:rPr lang="en-US" sz="1200" i="1" kern="1200" dirty="0">
+                <a:solidFill>
+                  <a:schemeClr val="tx1"/>
+                </a:solidFill>
+                <a:effectLst/>
+                <a:latin typeface="+mn-lt"/>
+                <a:ea typeface="+mn-ea"/>
+                <a:cs typeface="+mn-cs"/>
+              </a:rPr>
+              <a:t>is a system containing a set of controls that are perceivable by the</a:t>
+            </a:r>
+            <a:r>
+              <a:rPr lang="en-US" sz="1200" i="0" kern="1200" dirty="0">
+                <a:solidFill>
+                  <a:schemeClr val="tx1"/>
+                </a:solidFill>
+                <a:effectLst/>
+                <a:latin typeface="+mn-lt"/>
+                <a:ea typeface="+mn-ea"/>
+                <a:cs typeface="+mn-cs"/>
+              </a:rPr>
+              <a:t> </a:t>
+            </a:r>
+            <a:r>
+              <a:rPr lang="en-US" sz="1200" i="1" kern="1200" dirty="0">
+                <a:solidFill>
+                  <a:schemeClr val="tx1"/>
+                </a:solidFill>
+                <a:effectLst/>
+                <a:latin typeface="+mn-lt"/>
+                <a:ea typeface="+mn-ea"/>
+                <a:cs typeface="+mn-cs"/>
+              </a:rPr>
+              <a:t>person, and linked to a data entity. The data interface can contain other</a:t>
+            </a:r>
+            <a:r>
+              <a:rPr lang="en-US" sz="1200" i="0" kern="1200" dirty="0">
+                <a:solidFill>
+                  <a:schemeClr val="tx1"/>
+                </a:solidFill>
+                <a:effectLst/>
+                <a:latin typeface="+mn-lt"/>
+                <a:ea typeface="+mn-ea"/>
+                <a:cs typeface="+mn-cs"/>
+              </a:rPr>
+              <a:t> </a:t>
+            </a:r>
+            <a:r>
+              <a:rPr lang="en-US" sz="1200" i="1" kern="1200" dirty="0">
+                <a:solidFill>
+                  <a:schemeClr val="tx1"/>
+                </a:solidFill>
+                <a:effectLst/>
+                <a:latin typeface="+mn-lt"/>
+                <a:ea typeface="+mn-ea"/>
+                <a:cs typeface="+mn-cs"/>
+              </a:rPr>
+              <a:t>entities (e.g., a computer). The data entity itself is an abstracted intangible</a:t>
+            </a:r>
+            <a:r>
+              <a:rPr lang="en-US" sz="1200" i="0" kern="1200" dirty="0">
+                <a:solidFill>
+                  <a:schemeClr val="tx1"/>
+                </a:solidFill>
+                <a:effectLst/>
+                <a:latin typeface="+mn-lt"/>
+                <a:ea typeface="+mn-ea"/>
+                <a:cs typeface="+mn-cs"/>
+              </a:rPr>
+              <a:t> </a:t>
+            </a:r>
+            <a:r>
+              <a:rPr lang="en-US" sz="1200" i="1" kern="1200" dirty="0">
+                <a:solidFill>
+                  <a:schemeClr val="tx1"/>
+                </a:solidFill>
+                <a:effectLst/>
+                <a:latin typeface="+mn-lt"/>
+                <a:ea typeface="+mn-ea"/>
+                <a:cs typeface="+mn-cs"/>
+              </a:rPr>
+              <a:t>source that, like other abstracted notions such as “knowledge”,</a:t>
+            </a:r>
+            <a:r>
+              <a:rPr lang="en-US" sz="1200" i="0" kern="1200" dirty="0">
+                <a:solidFill>
+                  <a:schemeClr val="tx1"/>
+                </a:solidFill>
+                <a:effectLst/>
+                <a:latin typeface="+mn-lt"/>
+                <a:ea typeface="+mn-ea"/>
+                <a:cs typeface="+mn-cs"/>
+              </a:rPr>
+              <a:t> </a:t>
+            </a:r>
+            <a:r>
+              <a:rPr lang="en-US" sz="1200" i="1" kern="1200" dirty="0">
+                <a:solidFill>
+                  <a:schemeClr val="tx1"/>
+                </a:solidFill>
+                <a:effectLst/>
+                <a:latin typeface="+mn-lt"/>
+                <a:ea typeface="+mn-ea"/>
+                <a:cs typeface="+mn-cs"/>
+              </a:rPr>
+              <a:t>cannot physically constitute an actor in a two-way communication.</a:t>
+            </a:r>
+            <a:r>
+              <a:rPr lang="en-US" sz="1200" i="0" kern="1200" dirty="0">
+                <a:solidFill>
+                  <a:schemeClr val="tx1"/>
+                </a:solidFill>
+                <a:effectLst/>
+                <a:latin typeface="+mn-lt"/>
+                <a:ea typeface="+mn-ea"/>
+                <a:cs typeface="+mn-cs"/>
+              </a:rPr>
+              <a:t> </a:t>
+            </a:r>
+            <a:r>
+              <a:rPr lang="en-US" sz="1200" i="1" kern="1200" dirty="0">
+                <a:solidFill>
+                  <a:schemeClr val="tx1"/>
+                </a:solidFill>
+                <a:effectLst/>
+                <a:latin typeface="+mn-lt"/>
+                <a:ea typeface="+mn-ea"/>
+                <a:cs typeface="+mn-cs"/>
+              </a:rPr>
+              <a:t>Technically, the person interacts with the data interface (not the data</a:t>
+            </a:r>
+            <a:r>
+              <a:rPr lang="en-US" sz="1200" i="0" kern="1200" dirty="0">
+                <a:solidFill>
+                  <a:schemeClr val="tx1"/>
+                </a:solidFill>
+                <a:effectLst/>
+                <a:latin typeface="+mn-lt"/>
+                <a:ea typeface="+mn-ea"/>
+                <a:cs typeface="+mn-cs"/>
+              </a:rPr>
+              <a:t> </a:t>
+            </a:r>
+            <a:r>
+              <a:rPr lang="en-US" sz="1200" i="1" kern="1200" dirty="0">
+                <a:solidFill>
+                  <a:schemeClr val="tx1"/>
+                </a:solidFill>
+                <a:effectLst/>
+                <a:latin typeface="+mn-lt"/>
+                <a:ea typeface="+mn-ea"/>
+                <a:cs typeface="+mn-cs"/>
+              </a:rPr>
+              <a:t>entity), as the data interface is the one capable of providing a response.</a:t>
+            </a:r>
+            <a:endParaRPr lang="en-US" sz="1200" kern="1200" dirty="0">
+              <a:solidFill>
+                <a:schemeClr val="tx1"/>
+              </a:solidFill>
+              <a:effectLst/>
+              <a:latin typeface="+mn-lt"/>
+              <a:ea typeface="+mn-ea"/>
+              <a:cs typeface="+mn-cs"/>
+            </a:endParaRPr>
+          </a:p>
+          <a:p>
+            <a:endParaRPr lang="en-US" sz="1200" i="1" kern="1200" dirty="0">
+              <a:solidFill>
+                <a:schemeClr val="tx1"/>
+              </a:solidFill>
+              <a:effectLst/>
+              <a:latin typeface="+mn-lt"/>
+              <a:ea typeface="+mn-ea"/>
+              <a:cs typeface="+mn-cs"/>
+            </a:endParaRPr>
+          </a:p>
+          <a:p>
+            <a:r>
+              <a:rPr lang="en-US" sz="1200" i="1" kern="1200" dirty="0">
+                <a:solidFill>
+                  <a:schemeClr val="tx1"/>
+                </a:solidFill>
+                <a:effectLst/>
+                <a:latin typeface="+mn-lt"/>
+                <a:ea typeface="+mn-ea"/>
+                <a:cs typeface="+mn-cs"/>
+              </a:rPr>
+              <a:t>ACTION: We include any action, physical or mental, and regardless of modality,</a:t>
+            </a:r>
+            <a:r>
+              <a:rPr lang="en-US" sz="1200" i="0" kern="1200" dirty="0">
+                <a:solidFill>
+                  <a:schemeClr val="tx1"/>
+                </a:solidFill>
+                <a:effectLst/>
+                <a:latin typeface="+mn-lt"/>
+                <a:ea typeface="+mn-ea"/>
+                <a:cs typeface="+mn-cs"/>
+              </a:rPr>
+              <a:t> </a:t>
+            </a:r>
+            <a:r>
+              <a:rPr lang="en-US" sz="1200" i="1" kern="1200" dirty="0">
+                <a:solidFill>
+                  <a:schemeClr val="tx1"/>
+                </a:solidFill>
+                <a:effectLst/>
+                <a:latin typeface="+mn-lt"/>
+                <a:ea typeface="+mn-ea"/>
+                <a:cs typeface="+mn-cs"/>
+              </a:rPr>
+              <a:t>that causes the reaction of the data interface.</a:t>
+            </a:r>
+            <a:endParaRPr lang="en-US" sz="1200" kern="1200" dirty="0">
+              <a:solidFill>
+                <a:schemeClr val="tx1"/>
+              </a:solidFill>
+              <a:effectLst/>
+              <a:latin typeface="+mn-lt"/>
+              <a:ea typeface="+mn-ea"/>
+              <a:cs typeface="+mn-cs"/>
+            </a:endParaRPr>
+          </a:p>
+          <a:p>
+            <a:endParaRPr lang="en-US" sz="1200" i="1" kern="1200" dirty="0">
+              <a:solidFill>
+                <a:schemeClr val="tx1"/>
+              </a:solidFill>
+              <a:effectLst/>
+              <a:latin typeface="+mn-lt"/>
+              <a:ea typeface="+mn-ea"/>
+              <a:cs typeface="+mn-cs"/>
+            </a:endParaRPr>
+          </a:p>
+          <a:p>
+            <a:r>
+              <a:rPr lang="en-US" sz="1200" i="1" kern="1200" dirty="0">
+                <a:solidFill>
+                  <a:schemeClr val="tx1"/>
+                </a:solidFill>
+                <a:effectLst/>
+                <a:latin typeface="+mn-lt"/>
+                <a:ea typeface="+mn-ea"/>
+                <a:cs typeface="+mn-cs"/>
+              </a:rPr>
+              <a:t>ACTION-REACTION: Visualization and HCI agree that the interaction</a:t>
+            </a:r>
+            <a:r>
+              <a:rPr lang="en-US" sz="1200" i="0" kern="1200" dirty="0">
+                <a:solidFill>
+                  <a:schemeClr val="tx1"/>
+                </a:solidFill>
+                <a:effectLst/>
+                <a:latin typeface="+mn-lt"/>
+                <a:ea typeface="+mn-ea"/>
+                <a:cs typeface="+mn-cs"/>
+              </a:rPr>
+              <a:t> </a:t>
+            </a:r>
+            <a:r>
+              <a:rPr lang="en-US" sz="1200" i="1" kern="1200" dirty="0">
+                <a:solidFill>
+                  <a:schemeClr val="tx1"/>
+                </a:solidFill>
+                <a:effectLst/>
+                <a:latin typeface="+mn-lt"/>
+                <a:ea typeface="+mn-ea"/>
+                <a:cs typeface="+mn-cs"/>
+              </a:rPr>
+              <a:t>dialogue requires that the interface responds to a person’s action. </a:t>
+            </a:r>
+          </a:p>
+          <a:p>
+            <a:endParaRPr lang="en-US" sz="1200" i="1" kern="1200" dirty="0">
+              <a:solidFill>
+                <a:schemeClr val="tx1"/>
+              </a:solidFill>
+              <a:effectLst/>
+              <a:latin typeface="+mn-lt"/>
+              <a:ea typeface="+mn-ea"/>
+              <a:cs typeface="+mn-cs"/>
+            </a:endParaRPr>
+          </a:p>
+          <a:p>
+            <a:r>
+              <a:rPr lang="en-US" sz="1200" i="1" kern="1200" dirty="0">
+                <a:solidFill>
+                  <a:schemeClr val="tx1"/>
+                </a:solidFill>
+                <a:effectLst/>
+                <a:latin typeface="+mn-lt"/>
+                <a:ea typeface="+mn-ea"/>
+                <a:cs typeface="+mn-cs"/>
+              </a:rPr>
+              <a:t>REACTION PERCEIVED AS SUCH: Visualization and HCI agree that</a:t>
+            </a:r>
+            <a:r>
+              <a:rPr lang="en-US" sz="1200" i="0" kern="1200" dirty="0">
+                <a:solidFill>
+                  <a:schemeClr val="tx1"/>
+                </a:solidFill>
+                <a:effectLst/>
+                <a:latin typeface="+mn-lt"/>
+                <a:ea typeface="+mn-ea"/>
+                <a:cs typeface="+mn-cs"/>
+              </a:rPr>
+              <a:t> </a:t>
+            </a:r>
+            <a:r>
+              <a:rPr lang="en-US" sz="1200" i="1" kern="1200" dirty="0">
+                <a:solidFill>
+                  <a:schemeClr val="tx1"/>
+                </a:solidFill>
+                <a:effectLst/>
+                <a:latin typeface="+mn-lt"/>
+                <a:ea typeface="+mn-ea"/>
+                <a:cs typeface="+mn-cs"/>
+              </a:rPr>
+              <a:t>the interaction dialogue requires that the person perceives the reaction</a:t>
+            </a:r>
+            <a:r>
+              <a:rPr lang="en-US" sz="1200" i="0" kern="1200" dirty="0">
+                <a:solidFill>
+                  <a:schemeClr val="tx1"/>
+                </a:solidFill>
+                <a:effectLst/>
+                <a:latin typeface="+mn-lt"/>
+                <a:ea typeface="+mn-ea"/>
+                <a:cs typeface="+mn-cs"/>
+              </a:rPr>
+              <a:t> </a:t>
+            </a:r>
+            <a:r>
+              <a:rPr lang="en-US" sz="1200" i="1" kern="1200" dirty="0">
+                <a:solidFill>
+                  <a:schemeClr val="tx1"/>
+                </a:solidFill>
+                <a:effectLst/>
+                <a:latin typeface="+mn-lt"/>
+                <a:ea typeface="+mn-ea"/>
+                <a:cs typeface="+mn-cs"/>
+              </a:rPr>
+              <a:t>of the data interface</a:t>
+            </a:r>
+          </a:p>
+          <a:p>
+            <a:endParaRPr lang="en-US" sz="1200" i="1" kern="1200" dirty="0">
+              <a:solidFill>
+                <a:schemeClr val="tx1"/>
+              </a:solidFill>
+              <a:effectLst/>
+              <a:latin typeface="+mn-lt"/>
+              <a:ea typeface="+mn-ea"/>
+              <a:cs typeface="+mn-cs"/>
+            </a:endParaRPr>
+          </a:p>
+          <a:p>
+            <a:r>
+              <a:rPr lang="en-US" sz="1200" i="1" kern="1200" dirty="0">
+                <a:solidFill>
+                  <a:schemeClr val="tx1"/>
+                </a:solidFill>
+                <a:effectLst/>
+                <a:latin typeface="+mn-lt"/>
+                <a:ea typeface="+mn-ea"/>
+                <a:cs typeface="+mn-cs"/>
+              </a:rPr>
+              <a:t>DATA-RELATED INTENT: Visualization and HCI agree that interaction</a:t>
+            </a:r>
+            <a:r>
+              <a:rPr lang="en-US" sz="1200" i="0" kern="1200" dirty="0">
+                <a:solidFill>
+                  <a:schemeClr val="tx1"/>
+                </a:solidFill>
+                <a:effectLst/>
+                <a:latin typeface="+mn-lt"/>
+                <a:ea typeface="+mn-ea"/>
+                <a:cs typeface="+mn-cs"/>
+              </a:rPr>
+              <a:t> </a:t>
+            </a:r>
+            <a:r>
+              <a:rPr lang="en-US" sz="1200" i="1" kern="1200" dirty="0">
+                <a:solidFill>
+                  <a:schemeClr val="tx1"/>
+                </a:solidFill>
+                <a:effectLst/>
+                <a:latin typeface="+mn-lt"/>
+                <a:ea typeface="+mn-ea"/>
+                <a:cs typeface="+mn-cs"/>
+              </a:rPr>
+              <a:t>involves a teleological determination (i.e. a norm or goal of interaction).</a:t>
+            </a:r>
+            <a:r>
+              <a:rPr lang="en-US" sz="1200" i="0" kern="1200" dirty="0">
+                <a:solidFill>
+                  <a:schemeClr val="tx1"/>
+                </a:solidFill>
+                <a:effectLst/>
+                <a:latin typeface="+mn-lt"/>
+                <a:ea typeface="+mn-ea"/>
+                <a:cs typeface="+mn-cs"/>
+              </a:rPr>
+              <a:t> </a:t>
+            </a:r>
+            <a:r>
+              <a:rPr lang="en-US" sz="1200" i="1" kern="1200" dirty="0">
+                <a:solidFill>
+                  <a:schemeClr val="tx1"/>
+                </a:solidFill>
+                <a:effectLst/>
+                <a:latin typeface="+mn-lt"/>
+                <a:ea typeface="+mn-ea"/>
+                <a:cs typeface="+mn-cs"/>
+              </a:rPr>
+              <a:t>What differs is that the visualization intent (Sect. 5.1) is tied to a data</a:t>
+            </a:r>
+            <a:r>
+              <a:rPr lang="en-US" sz="1200" i="0" kern="1200" dirty="0">
+                <a:solidFill>
+                  <a:schemeClr val="tx1"/>
+                </a:solidFill>
+                <a:effectLst/>
+                <a:latin typeface="+mn-lt"/>
+                <a:ea typeface="+mn-ea"/>
+                <a:cs typeface="+mn-cs"/>
+              </a:rPr>
+              <a:t> </a:t>
+            </a:r>
+            <a:r>
+              <a:rPr lang="en-US" sz="1200" i="1" kern="1200" dirty="0">
+                <a:solidFill>
+                  <a:schemeClr val="tx1"/>
+                </a:solidFill>
+                <a:effectLst/>
+                <a:latin typeface="+mn-lt"/>
+                <a:ea typeface="+mn-ea"/>
+                <a:cs typeface="+mn-cs"/>
+              </a:rPr>
+              <a:t>source and is formed iteratively within the interaction cycle. </a:t>
+            </a:r>
+          </a:p>
+          <a:p>
+            <a:endParaRPr lang="en-US" sz="1200" i="1" kern="1200" dirty="0">
+              <a:solidFill>
+                <a:schemeClr val="tx1"/>
+              </a:solidFill>
+              <a:effectLst/>
+              <a:latin typeface="+mn-lt"/>
+              <a:ea typeface="+mn-ea"/>
+              <a:cs typeface="+mn-cs"/>
+            </a:endParaRPr>
+          </a:p>
+          <a:p>
+            <a:endParaRPr lang="en-US" sz="1200" kern="1200" dirty="0">
+              <a:solidFill>
+                <a:schemeClr val="tx1"/>
+              </a:solidFill>
+              <a:effectLst/>
+              <a:latin typeface="+mn-lt"/>
+              <a:ea typeface="+mn-ea"/>
+              <a:cs typeface="+mn-cs"/>
+            </a:endParaRPr>
+          </a:p>
+          <a:p>
+            <a:endParaRPr lang="en-US" dirty="0"/>
+          </a:p>
+        </p:txBody>
+      </p:sp>
+      <p:sp>
+        <p:nvSpPr>
+          <p:cNvPr id="4" name="Slide Number Placeholder 3">
+            <a:extLst>
+              <a:ext uri="{FF2B5EF4-FFF2-40B4-BE49-F238E27FC236}">
+                <a16:creationId xmlns:a16="http://schemas.microsoft.com/office/drawing/2014/main" id="{CB5CEBD6-7CF9-1E83-0D78-9A052B576892}"/>
+              </a:ext>
+            </a:extLst>
+          </p:cNvPr>
+          <p:cNvSpPr>
+            <a:spLocks noGrp="1"/>
+          </p:cNvSpPr>
+          <p:nvPr>
+            <p:ph type="sldNum" sz="quarter" idx="5"/>
+          </p:nvPr>
+        </p:nvSpPr>
+        <p:spPr/>
+        <p:txBody>
+          <a:bodyPr/>
+          <a:lstStyle/>
+          <a:p>
+            <a:fld id="{362CD335-F0CB-D347-B8A5-7AB70F34C34F}" type="slidenum">
+              <a:rPr lang="en-US" smtClean="0"/>
+              <a:t>12</a:t>
+            </a:fld>
+            <a:endParaRPr lang="en-US"/>
+          </a:p>
+        </p:txBody>
+      </p:sp>
+    </p:spTree>
+    <p:extLst>
+      <p:ext uri="{BB962C8B-B14F-4D97-AF65-F5344CB8AC3E}">
+        <p14:creationId xmlns:p14="http://schemas.microsoft.com/office/powerpoint/2010/main" val="2105623401"/>
+      </p:ext>
+    </p:extLst>
+  </p:cSld>
+  <p:clrMapOvr>
+    <a:masterClrMapping/>
+  </p:clrMapOvr>
+</p:notes>
+</file>
+
+<file path=ppt/notesSlides/notesSlide6.xml><?xml version="1.0" encoding="utf-8"?>
+<p:notes xmlns:a="http://schemas.openxmlformats.org/drawingml/2006/main" xmlns:r="http://schemas.openxmlformats.org/officeDocument/2006/relationships" xmlns:p="http://schemas.openxmlformats.org/presentationml/2006/main">
+  <p:cSld>
+    <p:spTree>
+      <p:nvGrpSpPr>
+        <p:cNvPr id="1" name="">
+          <a:extLst>
+            <a:ext uri="{FF2B5EF4-FFF2-40B4-BE49-F238E27FC236}">
+              <a16:creationId xmlns:a16="http://schemas.microsoft.com/office/drawing/2014/main" id="{F7A979D9-D3A0-07AB-A8EA-B3FD7EA1121C}"/>
+            </a:ext>
+          </a:extLst>
+        </p:cNvPr>
+        <p:cNvGrpSpPr/>
+        <p:nvPr/>
+      </p:nvGrpSpPr>
+      <p:grpSpPr>
+        <a:xfrm>
+          <a:off x="0" y="0"/>
+          <a:ext cx="0" cy="0"/>
+          <a:chOff x="0" y="0"/>
+          <a:chExt cx="0" cy="0"/>
+        </a:xfrm>
+      </p:grpSpPr>
+      <p:sp>
+        <p:nvSpPr>
+          <p:cNvPr id="2" name="Slide Image Placeholder 1">
+            <a:extLst>
+              <a:ext uri="{FF2B5EF4-FFF2-40B4-BE49-F238E27FC236}">
+                <a16:creationId xmlns:a16="http://schemas.microsoft.com/office/drawing/2014/main" id="{485D38D8-E6D9-A8E2-3D44-420B9D55BC82}"/>
+              </a:ext>
+            </a:extLst>
+          </p:cNvPr>
+          <p:cNvSpPr>
+            <a:spLocks noGrp="1" noRot="1" noChangeAspect="1"/>
+          </p:cNvSpPr>
+          <p:nvPr>
+            <p:ph type="sldImg"/>
+          </p:nvPr>
+        </p:nvSpPr>
+        <p:spPr/>
+      </p:sp>
+      <p:sp>
+        <p:nvSpPr>
+          <p:cNvPr id="3" name="Notes Placeholder 2">
+            <a:extLst>
+              <a:ext uri="{FF2B5EF4-FFF2-40B4-BE49-F238E27FC236}">
+                <a16:creationId xmlns:a16="http://schemas.microsoft.com/office/drawing/2014/main" id="{90B81374-1480-1402-0D83-55333C539E31}"/>
+              </a:ext>
+            </a:extLst>
+          </p:cNvPr>
+          <p:cNvSpPr>
+            <a:spLocks noGrp="1"/>
+          </p:cNvSpPr>
+          <p:nvPr>
+            <p:ph type="body" idx="1"/>
+          </p:nvPr>
+        </p:nvSpPr>
+        <p:spPr/>
+        <p:txBody>
+          <a:bodyPr/>
+          <a:lstStyle/>
+          <a:p>
+            <a:r>
+              <a:rPr lang="en-US" sz="1200" i="1" kern="1200">
+                <a:solidFill>
+                  <a:schemeClr val="tx1"/>
+                </a:solidFill>
+                <a:effectLst/>
+                <a:latin typeface="+mn-lt"/>
+                <a:ea typeface="+mn-ea"/>
+                <a:cs typeface="+mn-cs"/>
+              </a:rPr>
+              <a:t>No</a:t>
+            </a:r>
+            <a:r>
+              <a:rPr lang="en-US" sz="1200" i="1" kern="1200" dirty="0">
+                <a:solidFill>
+                  <a:schemeClr val="tx1"/>
+                </a:solidFill>
+                <a:effectLst/>
+                <a:latin typeface="+mn-lt"/>
+                <a:ea typeface="+mn-ea"/>
+                <a:cs typeface="+mn-cs"/>
+              </a:rPr>
+              <a:t>. While there were several actions from the person, the</a:t>
+            </a:r>
+            <a:endParaRPr lang="en-US" sz="1200" kern="1200" dirty="0">
+              <a:solidFill>
+                <a:schemeClr val="tx1"/>
+              </a:solidFill>
+              <a:effectLst/>
+              <a:latin typeface="+mn-lt"/>
+              <a:ea typeface="+mn-ea"/>
+              <a:cs typeface="+mn-cs"/>
+            </a:endParaRPr>
+          </a:p>
+          <a:p>
+            <a:r>
+              <a:rPr lang="en-US" sz="1200" i="1" kern="1200" dirty="0">
+                <a:solidFill>
+                  <a:schemeClr val="tx1"/>
+                </a:solidFill>
+                <a:effectLst/>
+                <a:latin typeface="+mn-lt"/>
+                <a:ea typeface="+mn-ea"/>
+                <a:cs typeface="+mn-cs"/>
+              </a:rPr>
+              <a:t>visualization did not return any reaction as a response to those actions.</a:t>
+            </a:r>
+            <a:endParaRPr lang="en-US" sz="1200" kern="1200" dirty="0">
+              <a:solidFill>
+                <a:schemeClr val="tx1"/>
+              </a:solidFill>
+              <a:effectLst/>
+              <a:latin typeface="+mn-lt"/>
+              <a:ea typeface="+mn-ea"/>
+              <a:cs typeface="+mn-cs"/>
+            </a:endParaRPr>
+          </a:p>
+          <a:p>
+            <a:endParaRPr lang="en-US" dirty="0"/>
+          </a:p>
+        </p:txBody>
+      </p:sp>
+      <p:sp>
+        <p:nvSpPr>
+          <p:cNvPr id="4" name="Slide Number Placeholder 3">
+            <a:extLst>
+              <a:ext uri="{FF2B5EF4-FFF2-40B4-BE49-F238E27FC236}">
+                <a16:creationId xmlns:a16="http://schemas.microsoft.com/office/drawing/2014/main" id="{8E51272F-E86C-D2AC-31C8-A70AE17CE5BA}"/>
+              </a:ext>
+            </a:extLst>
+          </p:cNvPr>
+          <p:cNvSpPr>
+            <a:spLocks noGrp="1"/>
+          </p:cNvSpPr>
+          <p:nvPr>
+            <p:ph type="sldNum" sz="quarter" idx="5"/>
+          </p:nvPr>
+        </p:nvSpPr>
+        <p:spPr/>
+        <p:txBody>
+          <a:bodyPr/>
+          <a:lstStyle/>
+          <a:p>
+            <a:fld id="{362CD335-F0CB-D347-B8A5-7AB70F34C34F}" type="slidenum">
+              <a:rPr lang="en-US" smtClean="0"/>
+              <a:t>13</a:t>
+            </a:fld>
+            <a:endParaRPr lang="en-US"/>
+          </a:p>
+        </p:txBody>
+      </p:sp>
+    </p:spTree>
+    <p:extLst>
+      <p:ext uri="{BB962C8B-B14F-4D97-AF65-F5344CB8AC3E}">
+        <p14:creationId xmlns:p14="http://schemas.microsoft.com/office/powerpoint/2010/main" val="260005402"/>
+      </p:ext>
+    </p:extLst>
+  </p:cSld>
+  <p:clrMapOvr>
+    <a:masterClrMapping/>
+  </p:clrMapOvr>
+</p:notes>
+</file>
+
 <file path=ppt/slideLayouts/slideLayout1.xml><?xml version="1.0" encoding="utf-8"?>
 <p:sldLayout xmlns:a="http://schemas.openxmlformats.org/drawingml/2006/main" xmlns:r="http://schemas.openxmlformats.org/officeDocument/2006/relationships" xmlns:p="http://schemas.openxmlformats.org/presentationml/2006/main" type="title" preserve="1">
   <p:cSld name="Title Slide">
@@ -1114,7 +1987,7 @@
             <a:fld id="{B61BEF0D-F0BB-DE4B-95CE-6DB70DBA9567}" type="datetimeFigureOut">
               <a:rPr lang="en-US" smtClean="0"/>
               <a:pPr/>
-              <a:t>12/16/25</a:t>
+              <a:t>1/6/26</a:t>
             </a:fld>
             <a:endParaRPr lang="en-US" dirty="0"/>
           </a:p>
@@ -1378,7 +2251,7 @@
             <a:fld id="{B61BEF0D-F0BB-DE4B-95CE-6DB70DBA9567}" type="datetimeFigureOut">
               <a:rPr lang="en-US" smtClean="0"/>
               <a:pPr/>
-              <a:t>12/16/25</a:t>
+              <a:t>1/6/26</a:t>
             </a:fld>
             <a:endParaRPr lang="en-US" dirty="0"/>
           </a:p>
@@ -1615,7 +2488,7 @@
             <a:fld id="{B61BEF0D-F0BB-DE4B-95CE-6DB70DBA9567}" type="datetimeFigureOut">
               <a:rPr lang="en-US" smtClean="0"/>
               <a:pPr/>
-              <a:t>12/16/25</a:t>
+              <a:t>1/6/26</a:t>
             </a:fld>
             <a:endParaRPr lang="en-US" dirty="0"/>
           </a:p>
@@ -1864,7 +2737,7 @@
             <a:fld id="{B61BEF0D-F0BB-DE4B-95CE-6DB70DBA9567}" type="datetimeFigureOut">
               <a:rPr lang="en-US" smtClean="0"/>
               <a:pPr/>
-              <a:t>12/16/25</a:t>
+              <a:t>1/6/26</a:t>
             </a:fld>
             <a:endParaRPr lang="en-US" dirty="0"/>
           </a:p>
@@ -2173,7 +3046,7 @@
             <a:fld id="{B61BEF0D-F0BB-DE4B-95CE-6DB70DBA9567}" type="datetimeFigureOut">
               <a:rPr lang="en-US" smtClean="0"/>
               <a:pPr/>
-              <a:t>12/16/25</a:t>
+              <a:t>1/6/26</a:t>
             </a:fld>
             <a:endParaRPr lang="en-US" dirty="0"/>
           </a:p>
@@ -2477,7 +3350,7 @@
             <a:fld id="{B61BEF0D-F0BB-DE4B-95CE-6DB70DBA9567}" type="datetimeFigureOut">
               <a:rPr lang="en-US" smtClean="0"/>
               <a:pPr/>
-              <a:t>12/16/25</a:t>
+              <a:t>1/6/26</a:t>
             </a:fld>
             <a:endParaRPr lang="en-US" dirty="0"/>
           </a:p>
@@ -2901,7 +3774,7 @@
             <a:fld id="{B61BEF0D-F0BB-DE4B-95CE-6DB70DBA9567}" type="datetimeFigureOut">
               <a:rPr lang="en-US" smtClean="0"/>
               <a:pPr/>
-              <a:t>12/16/25</a:t>
+              <a:t>1/6/26</a:t>
             </a:fld>
             <a:endParaRPr lang="en-US" dirty="0"/>
           </a:p>
@@ -2998,7 +3871,7 @@
             <a:fld id="{B61BEF0D-F0BB-DE4B-95CE-6DB70DBA9567}" type="datetimeFigureOut">
               <a:rPr lang="en-US" smtClean="0"/>
               <a:pPr/>
-              <a:t>12/16/25</a:t>
+              <a:t>1/6/26</a:t>
             </a:fld>
             <a:endParaRPr lang="en-US" dirty="0"/>
           </a:p>
@@ -3162,7 +4035,7 @@
             <a:fld id="{B61BEF0D-F0BB-DE4B-95CE-6DB70DBA9567}" type="datetimeFigureOut">
               <a:rPr lang="en-US" smtClean="0"/>
               <a:pPr/>
-              <a:t>12/16/25</a:t>
+              <a:t>1/6/26</a:t>
             </a:fld>
             <a:endParaRPr lang="en-US" dirty="0"/>
           </a:p>
@@ -3542,7 +4415,7 @@
             <a:fld id="{B61BEF0D-F0BB-DE4B-95CE-6DB70DBA9567}" type="datetimeFigureOut">
               <a:rPr lang="en-US" smtClean="0"/>
               <a:pPr/>
-              <a:t>12/16/25</a:t>
+              <a:t>1/6/26</a:t>
             </a:fld>
             <a:endParaRPr lang="en-US" dirty="0"/>
           </a:p>
@@ -3833,7 +4706,7 @@
             <a:fld id="{B61BEF0D-F0BB-DE4B-95CE-6DB70DBA9567}" type="datetimeFigureOut">
               <a:rPr lang="en-US" smtClean="0"/>
               <a:pPr/>
-              <a:t>12/16/25</a:t>
+              <a:t>1/6/26</a:t>
             </a:fld>
             <a:endParaRPr lang="en-US" dirty="0"/>
           </a:p>
@@ -4046,7 +4919,7 @@
             <a:fld id="{B61BEF0D-F0BB-DE4B-95CE-6DB70DBA9567}" type="datetimeFigureOut">
               <a:rPr lang="en-US" smtClean="0"/>
               <a:pPr/>
-              <a:t>12/16/25</a:t>
+              <a:t>1/6/26</a:t>
             </a:fld>
             <a:endParaRPr lang="en-US" dirty="0"/>
           </a:p>
@@ -5203,20 +6076,66 @@
           <a:p>
             <a:r>
               <a:rPr lang="en-US" sz="2400" dirty="0"/>
-              <a:t>Interaction as a Reasoning Aid</a:t>
+              <a:t>Interaction as a Reasoning Aid: situation</a:t>
             </a:r>
           </a:p>
           <a:p>
             <a:pPr lvl="1"/>
             <a:r>
               <a:rPr lang="en-US" sz="2200" dirty="0"/>
-              <a:t>Situated </a:t>
-            </a:r>
-            <a:r>
-              <a:rPr lang="en-US" sz="2200"/>
-              <a:t>Cognition  </a:t>
-            </a:r>
-            <a:endParaRPr lang="en-US" sz="2200" dirty="0"/>
+              <a:t>Lemke calls situation an ‘ecology’, evoking the dynamic interaction between concepts and thinkers in the process of knowledge construction</a:t>
+            </a:r>
+          </a:p>
+          <a:p>
+            <a:pPr lvl="1"/>
+            <a:r>
+              <a:rPr lang="en-US" sz="2200" dirty="0">
+                <a:effectLst>
+                  <a:glow rad="228600">
+                    <a:schemeClr val="accent5">
+                      <a:satMod val="175000"/>
+                      <a:alpha val="40000"/>
+                    </a:schemeClr>
+                  </a:glow>
+                </a:effectLst>
+              </a:rPr>
+              <a:t>Situated cognition </a:t>
+            </a:r>
+            <a:r>
+              <a:rPr lang="en-US" sz="2200" dirty="0"/>
+              <a:t>theorizes cognition as an emergent property of interactions between people and their environment through perception and action </a:t>
+            </a:r>
+          </a:p>
+          <a:p>
+            <a:pPr lvl="2"/>
+            <a:r>
+              <a:rPr lang="en-US" sz="2200" dirty="0"/>
+              <a:t> In other words… cognition is not a purely mental activity; it requires interaction with artifacts </a:t>
+            </a:r>
+          </a:p>
+          <a:p>
+            <a:pPr lvl="1"/>
+            <a:r>
+              <a:rPr lang="en-US" sz="2200" dirty="0"/>
+              <a:t>Interaction supports </a:t>
+            </a:r>
+            <a:r>
+              <a:rPr lang="en-US" sz="2200" dirty="0">
+                <a:effectLst>
+                  <a:glow rad="228600">
+                    <a:schemeClr val="accent5">
+                      <a:satMod val="175000"/>
+                      <a:alpha val="40000"/>
+                    </a:schemeClr>
+                  </a:glow>
+                </a:effectLst>
+              </a:rPr>
+              <a:t>dialogical inquiry</a:t>
+            </a:r>
+            <a:r>
+              <a:rPr lang="en-US" sz="2200" dirty="0"/>
+              <a:t>; the user and tool each posses questions and answers, as the user interacts to answer one question, they may encounter new ones </a:t>
+            </a:r>
           </a:p>
         </p:txBody>
       </p:sp>
@@ -5311,6 +6230,463 @@
     <p:extLst>
       <p:ext uri="{BB962C8B-B14F-4D97-AF65-F5344CB8AC3E}">
         <p14:creationId xmlns:p14="http://schemas.microsoft.com/office/powerpoint/2010/main" val="1971119257"/>
+      </p:ext>
+    </p:extLst>
+  </p:cSld>
+  <p:clrMapOvr>
+    <a:masterClrMapping/>
+  </p:clrMapOvr>
+</p:sld>
+</file>
+
+<file path=ppt/slides/slide12.xml><?xml version="1.0" encoding="utf-8"?>
+<p:sld xmlns:a="http://schemas.openxmlformats.org/drawingml/2006/main" xmlns:r="http://schemas.openxmlformats.org/officeDocument/2006/relationships" xmlns:p="http://schemas.openxmlformats.org/presentationml/2006/main">
+  <p:cSld>
+    <p:spTree>
+      <p:nvGrpSpPr>
+        <p:cNvPr id="1" name="">
+          <a:extLst>
+            <a:ext uri="{FF2B5EF4-FFF2-40B4-BE49-F238E27FC236}">
+              <a16:creationId xmlns:a16="http://schemas.microsoft.com/office/drawing/2014/main" id="{AD7B8314-01F0-AE26-1119-7E8278781A87}"/>
+            </a:ext>
+          </a:extLst>
+        </p:cNvPr>
+        <p:cNvGrpSpPr/>
+        <p:nvPr/>
+      </p:nvGrpSpPr>
+      <p:grpSpPr>
+        <a:xfrm>
+          <a:off x="0" y="0"/>
+          <a:ext cx="0" cy="0"/>
+          <a:chOff x="0" y="0"/>
+          <a:chExt cx="0" cy="0"/>
+        </a:xfrm>
+      </p:grpSpPr>
+      <p:sp>
+        <p:nvSpPr>
+          <p:cNvPr id="2" name="Title 1">
+            <a:extLst>
+              <a:ext uri="{FF2B5EF4-FFF2-40B4-BE49-F238E27FC236}">
+                <a16:creationId xmlns:a16="http://schemas.microsoft.com/office/drawing/2014/main" id="{AFAA836A-63BB-18A0-881A-523933A63966}"/>
+              </a:ext>
+            </a:extLst>
+          </p:cNvPr>
+          <p:cNvSpPr>
+            <a:spLocks noGrp="1"/>
+          </p:cNvSpPr>
+          <p:nvPr>
+            <p:ph type="title"/>
+          </p:nvPr>
+        </p:nvSpPr>
+        <p:spPr/>
+        <p:txBody>
+          <a:bodyPr/>
+          <a:lstStyle/>
+          <a:p>
+            <a:r>
+              <a:rPr lang="en-US" dirty="0"/>
+              <a:t>Defining Interaction for Visualization </a:t>
+            </a:r>
+          </a:p>
+        </p:txBody>
+      </p:sp>
+      <p:sp>
+        <p:nvSpPr>
+          <p:cNvPr id="3" name="Content Placeholder 2">
+            <a:extLst>
+              <a:ext uri="{FF2B5EF4-FFF2-40B4-BE49-F238E27FC236}">
+                <a16:creationId xmlns:a16="http://schemas.microsoft.com/office/drawing/2014/main" id="{930C0F5B-AFBA-FCE6-A747-7E2EE52D8BA8}"/>
+              </a:ext>
+            </a:extLst>
+          </p:cNvPr>
+          <p:cNvSpPr>
+            <a:spLocks noGrp="1"/>
+          </p:cNvSpPr>
+          <p:nvPr>
+            <p:ph idx="1"/>
+          </p:nvPr>
+        </p:nvSpPr>
+        <p:spPr>
+          <a:xfrm>
+            <a:off x="581192" y="2576945"/>
+            <a:ext cx="11029615" cy="3784944"/>
+          </a:xfrm>
+          <a:effectLst>
+            <a:glow rad="228600">
+              <a:schemeClr val="accent5">
+                <a:satMod val="175000"/>
+                <a:alpha val="40000"/>
+              </a:schemeClr>
+            </a:glow>
+          </a:effectLst>
+        </p:spPr>
+        <p:txBody>
+          <a:bodyPr anchor="t">
+            <a:normAutofit/>
+          </a:bodyPr>
+          <a:lstStyle/>
+          <a:p>
+            <a:pPr marL="0" indent="0" algn="ctr">
+              <a:buNone/>
+            </a:pPr>
+            <a:r>
+              <a:rPr lang="en-US" sz="3600" dirty="0"/>
+              <a:t>Interaction for visualization is the interplay between a person and a data interface involving a data-related intent, at least one action from the person and an interface reaction that is perceived as such.</a:t>
+            </a:r>
+          </a:p>
+          <a:p>
+            <a:pPr marL="0" indent="0">
+              <a:buNone/>
+            </a:pPr>
+            <a:endParaRPr lang="en-US" sz="2200" dirty="0"/>
+          </a:p>
+        </p:txBody>
+      </p:sp>
+      <p:sp>
+        <p:nvSpPr>
+          <p:cNvPr id="4" name="TextBox 3">
+            <a:extLst>
+              <a:ext uri="{FF2B5EF4-FFF2-40B4-BE49-F238E27FC236}">
+                <a16:creationId xmlns:a16="http://schemas.microsoft.com/office/drawing/2014/main" id="{488D74F3-BD62-2960-17F3-3A712B312506}"/>
+              </a:ext>
+            </a:extLst>
+          </p:cNvPr>
+          <p:cNvSpPr txBox="1"/>
+          <p:nvPr/>
+        </p:nvSpPr>
+        <p:spPr>
+          <a:xfrm>
+            <a:off x="7997125" y="5872322"/>
+            <a:ext cx="4194875" cy="954107"/>
+          </a:xfrm>
+          <a:prstGeom prst="rect">
+            <a:avLst/>
+          </a:prstGeom>
+          <a:noFill/>
+        </p:spPr>
+        <p:txBody>
+          <a:bodyPr wrap="square">
+            <a:spAutoFit/>
+          </a:bodyPr>
+          <a:lstStyle/>
+          <a:p>
+            <a:r>
+              <a:rPr lang="en-US" sz="1400" dirty="0"/>
+              <a:t>E. </a:t>
+            </a:r>
+            <a:r>
+              <a:rPr lang="en-US" sz="1400" dirty="0" err="1"/>
+              <a:t>Dimara</a:t>
+            </a:r>
+            <a:r>
+              <a:rPr lang="en-US" sz="1400" dirty="0"/>
+              <a:t> and C. Perin, "What is Interaction for Data Visualization?," in </a:t>
+            </a:r>
+            <a:r>
+              <a:rPr lang="en-US" sz="1400" i="1" dirty="0"/>
+              <a:t>IEEE Transactions on Visualization and Computer Graphics</a:t>
+            </a:r>
+            <a:r>
+              <a:rPr lang="en-US" sz="1400" dirty="0"/>
+              <a:t>, vol. 26, no. 1, pp. 119-129, Jan. 2020, </a:t>
+            </a:r>
+            <a:r>
+              <a:rPr lang="en-US" sz="1400" dirty="0" err="1"/>
+              <a:t>doi</a:t>
+            </a:r>
+            <a:r>
+              <a:rPr lang="en-US" sz="1400" dirty="0"/>
+              <a:t>: 10.1109/TVCG.2019.2934283. </a:t>
+            </a:r>
+            <a:endParaRPr lang="en-US" sz="1100" dirty="0"/>
+          </a:p>
+        </p:txBody>
+      </p:sp>
+    </p:spTree>
+    <p:extLst>
+      <p:ext uri="{BB962C8B-B14F-4D97-AF65-F5344CB8AC3E}">
+        <p14:creationId xmlns:p14="http://schemas.microsoft.com/office/powerpoint/2010/main" val="2046576373"/>
+      </p:ext>
+    </p:extLst>
+  </p:cSld>
+  <p:clrMapOvr>
+    <a:masterClrMapping/>
+  </p:clrMapOvr>
+</p:sld>
+</file>
+
+<file path=ppt/slides/slide13.xml><?xml version="1.0" encoding="utf-8"?>
+<p:sld xmlns:a="http://schemas.openxmlformats.org/drawingml/2006/main" xmlns:r="http://schemas.openxmlformats.org/officeDocument/2006/relationships" xmlns:p="http://schemas.openxmlformats.org/presentationml/2006/main">
+  <p:cSld>
+    <p:spTree>
+      <p:nvGrpSpPr>
+        <p:cNvPr id="1" name="">
+          <a:extLst>
+            <a:ext uri="{FF2B5EF4-FFF2-40B4-BE49-F238E27FC236}">
+              <a16:creationId xmlns:a16="http://schemas.microsoft.com/office/drawing/2014/main" id="{EB7DFCBE-0443-881F-EF77-8900602DDD08}"/>
+            </a:ext>
+          </a:extLst>
+        </p:cNvPr>
+        <p:cNvGrpSpPr/>
+        <p:nvPr/>
+      </p:nvGrpSpPr>
+      <p:grpSpPr>
+        <a:xfrm>
+          <a:off x="0" y="0"/>
+          <a:ext cx="0" cy="0"/>
+          <a:chOff x="0" y="0"/>
+          <a:chExt cx="0" cy="0"/>
+        </a:xfrm>
+      </p:grpSpPr>
+      <p:sp>
+        <p:nvSpPr>
+          <p:cNvPr id="2" name="Title 1">
+            <a:extLst>
+              <a:ext uri="{FF2B5EF4-FFF2-40B4-BE49-F238E27FC236}">
+                <a16:creationId xmlns:a16="http://schemas.microsoft.com/office/drawing/2014/main" id="{A91CF773-EA5A-C8C9-BA0A-AF6BFF8AE370}"/>
+              </a:ext>
+            </a:extLst>
+          </p:cNvPr>
+          <p:cNvSpPr>
+            <a:spLocks noGrp="1"/>
+          </p:cNvSpPr>
+          <p:nvPr>
+            <p:ph type="title"/>
+          </p:nvPr>
+        </p:nvSpPr>
+        <p:spPr/>
+        <p:txBody>
+          <a:bodyPr/>
+          <a:lstStyle/>
+          <a:p>
+            <a:r>
+              <a:rPr lang="en-US" dirty="0"/>
+              <a:t>Defining Interaction for Visualization </a:t>
+            </a:r>
+          </a:p>
+        </p:txBody>
+      </p:sp>
+      <p:sp>
+        <p:nvSpPr>
+          <p:cNvPr id="3" name="Content Placeholder 2">
+            <a:extLst>
+              <a:ext uri="{FF2B5EF4-FFF2-40B4-BE49-F238E27FC236}">
+                <a16:creationId xmlns:a16="http://schemas.microsoft.com/office/drawing/2014/main" id="{186C832E-0E41-C730-3EFD-672FEBEC08B0}"/>
+              </a:ext>
+            </a:extLst>
+          </p:cNvPr>
+          <p:cNvSpPr>
+            <a:spLocks noGrp="1"/>
+          </p:cNvSpPr>
+          <p:nvPr>
+            <p:ph idx="1"/>
+          </p:nvPr>
+        </p:nvSpPr>
+        <p:spPr>
+          <a:xfrm>
+            <a:off x="581192" y="2202873"/>
+            <a:ext cx="11029615" cy="4159016"/>
+          </a:xfrm>
+          <a:effectLst>
+            <a:glow rad="228600">
+              <a:schemeClr val="accent5">
+                <a:satMod val="175000"/>
+                <a:alpha val="40000"/>
+              </a:schemeClr>
+            </a:glow>
+          </a:effectLst>
+        </p:spPr>
+        <p:txBody>
+          <a:bodyPr anchor="t">
+            <a:normAutofit/>
+          </a:bodyPr>
+          <a:lstStyle/>
+          <a:p>
+            <a:pPr marL="0" indent="0">
+              <a:buNone/>
+            </a:pPr>
+            <a:r>
+              <a:rPr lang="en-US" sz="2400" dirty="0"/>
+              <a:t>Interaction for visualization is the interplay between a person and a data interface involving a data-related intent, at least one action from the person and an interface reaction that is perceived as such.</a:t>
+            </a:r>
+          </a:p>
+          <a:p>
+            <a:pPr marL="0" indent="0">
+              <a:buNone/>
+            </a:pPr>
+            <a:endParaRPr lang="en-US" sz="2200" dirty="0"/>
+          </a:p>
+          <a:p>
+            <a:pPr marL="0" indent="0">
+              <a:buNone/>
+            </a:pPr>
+            <a:endParaRPr lang="en-US" sz="2200" dirty="0"/>
+          </a:p>
+        </p:txBody>
+      </p:sp>
+      <p:sp>
+        <p:nvSpPr>
+          <p:cNvPr id="4" name="TextBox 3">
+            <a:extLst>
+              <a:ext uri="{FF2B5EF4-FFF2-40B4-BE49-F238E27FC236}">
+                <a16:creationId xmlns:a16="http://schemas.microsoft.com/office/drawing/2014/main" id="{8E2BA585-BB70-59D2-CBCA-75E84E029106}"/>
+              </a:ext>
+            </a:extLst>
+          </p:cNvPr>
+          <p:cNvSpPr txBox="1"/>
+          <p:nvPr/>
+        </p:nvSpPr>
+        <p:spPr>
+          <a:xfrm>
+            <a:off x="7997125" y="5872322"/>
+            <a:ext cx="4194875" cy="954107"/>
+          </a:xfrm>
+          <a:prstGeom prst="rect">
+            <a:avLst/>
+          </a:prstGeom>
+          <a:noFill/>
+        </p:spPr>
+        <p:txBody>
+          <a:bodyPr wrap="square">
+            <a:spAutoFit/>
+          </a:bodyPr>
+          <a:lstStyle/>
+          <a:p>
+            <a:r>
+              <a:rPr lang="en-US" sz="1400" dirty="0"/>
+              <a:t>E. </a:t>
+            </a:r>
+            <a:r>
+              <a:rPr lang="en-US" sz="1400" dirty="0" err="1"/>
+              <a:t>Dimara</a:t>
+            </a:r>
+            <a:r>
+              <a:rPr lang="en-US" sz="1400" dirty="0"/>
+              <a:t> and C. Perin, "What is Interaction for Data Visualization?," in </a:t>
+            </a:r>
+            <a:r>
+              <a:rPr lang="en-US" sz="1400" i="1" dirty="0"/>
+              <a:t>IEEE Transactions on Visualization and Computer Graphics</a:t>
+            </a:r>
+            <a:r>
+              <a:rPr lang="en-US" sz="1400" dirty="0"/>
+              <a:t>, vol. 26, no. 1, pp. 119-129, Jan. 2020, </a:t>
+            </a:r>
+            <a:r>
+              <a:rPr lang="en-US" sz="1400" dirty="0" err="1"/>
+              <a:t>doi</a:t>
+            </a:r>
+            <a:r>
+              <a:rPr lang="en-US" sz="1400" dirty="0"/>
+              <a:t>: 10.1109/TVCG.2019.2934283. </a:t>
+            </a:r>
+            <a:endParaRPr lang="en-US" sz="1100" dirty="0"/>
+          </a:p>
+        </p:txBody>
+      </p:sp>
+      <p:sp>
+        <p:nvSpPr>
+          <p:cNvPr id="5" name="Rounded Rectangle 4">
+            <a:extLst>
+              <a:ext uri="{FF2B5EF4-FFF2-40B4-BE49-F238E27FC236}">
+                <a16:creationId xmlns:a16="http://schemas.microsoft.com/office/drawing/2014/main" id="{4803CD60-8B5A-55E1-9A25-8DCEC0D3210E}"/>
+              </a:ext>
+            </a:extLst>
+          </p:cNvPr>
+          <p:cNvSpPr/>
+          <p:nvPr/>
+        </p:nvSpPr>
+        <p:spPr>
+          <a:xfrm>
+            <a:off x="581191" y="3429000"/>
+            <a:ext cx="11029615" cy="2443321"/>
+          </a:xfrm>
+          <a:prstGeom prst="roundRect">
+            <a:avLst/>
+          </a:prstGeom>
+        </p:spPr>
+        <p:style>
+          <a:lnRef idx="2">
+            <a:schemeClr val="accent1">
+              <a:shade val="15000"/>
+            </a:schemeClr>
+          </a:lnRef>
+          <a:fillRef idx="1">
+            <a:schemeClr val="accent1"/>
+          </a:fillRef>
+          <a:effectRef idx="0">
+            <a:schemeClr val="accent1"/>
+          </a:effectRef>
+          <a:fontRef idx="minor">
+            <a:schemeClr val="lt1"/>
+          </a:fontRef>
+        </p:style>
+        <p:txBody>
+          <a:bodyPr rtlCol="0" anchor="t"/>
+          <a:lstStyle/>
+          <a:p>
+            <a:r>
+              <a:rPr lang="en-US" sz="2400" dirty="0"/>
+              <a:t>Interaction?</a:t>
+            </a:r>
+          </a:p>
+          <a:p>
+            <a:endParaRPr lang="en-US" sz="2400" dirty="0"/>
+          </a:p>
+          <a:p>
+            <a:r>
+              <a:rPr lang="en-US" sz="2400" i="1" dirty="0"/>
+              <a:t>Joe is staring at a visualization without performing any</a:t>
+            </a:r>
+            <a:r>
+              <a:rPr lang="en-US" sz="2400" dirty="0"/>
+              <a:t> </a:t>
+            </a:r>
+            <a:r>
+              <a:rPr lang="en-US" sz="2400" i="1" dirty="0"/>
+              <a:t>action that is interpretable by the visualization. He is reasoning (mentally)</a:t>
+            </a:r>
+            <a:r>
+              <a:rPr lang="en-US" sz="2400" dirty="0"/>
+              <a:t> </a:t>
+            </a:r>
+            <a:r>
+              <a:rPr lang="en-US" sz="2400" i="1" dirty="0"/>
+              <a:t>about the visualized data. There are further (computer initiated)</a:t>
+            </a:r>
+            <a:r>
+              <a:rPr lang="en-US" sz="2400" dirty="0"/>
+              <a:t> </a:t>
+            </a:r>
+            <a:r>
+              <a:rPr lang="en-US" sz="2400" i="1" dirty="0"/>
+              <a:t>animations, real time changes that show important information that Joe</a:t>
+            </a:r>
+            <a:r>
+              <a:rPr lang="en-US" sz="2400" dirty="0"/>
+              <a:t> </a:t>
+            </a:r>
+            <a:r>
+              <a:rPr lang="en-US" sz="2400" i="1" dirty="0"/>
+              <a:t>takes into account in his reasoning process.</a:t>
+            </a:r>
+            <a:endParaRPr lang="en-US" sz="2400" dirty="0"/>
+          </a:p>
+          <a:p>
+            <a:endParaRPr lang="en-US" sz="2400" dirty="0"/>
+          </a:p>
+          <a:p>
+            <a:r>
+              <a:rPr lang="en-US" sz="2400" dirty="0"/>
+              <a:t> </a:t>
+            </a:r>
+          </a:p>
+        </p:txBody>
+      </p:sp>
+    </p:spTree>
+    <p:extLst>
+      <p:ext uri="{BB962C8B-B14F-4D97-AF65-F5344CB8AC3E}">
+        <p14:creationId xmlns:p14="http://schemas.microsoft.com/office/powerpoint/2010/main" val="972984428"/>
       </p:ext>
     </p:extLst>
   </p:cSld>
